--- a/examples/science-plant-life-cycle/science-plant-life-cycle.pptx
+++ b/examples/science-plant-life-cycle/science-plant-life-cycle.pptx
@@ -7,6 +7,14 @@
   <p:sldIdLst>
     <p:sldId id="256" r:id="rId7"/>
     <p:sldId id="257" r:id="rId8"/>
+    <p:sldId id="258" r:id="rId9"/>
+    <p:sldId id="259" r:id="rId10"/>
+    <p:sldId id="260" r:id="rId11"/>
+    <p:sldId id="261" r:id="rId12"/>
+    <p:sldId id="262" r:id="rId13"/>
+    <p:sldId id="263" r:id="rId14"/>
+    <p:sldId id="264" r:id="rId15"/>
+    <p:sldId id="265" r:id="rId16"/>
   </p:sldIdLst>
   <p:sldSz cx="12191695" cy="6858000" type="screen4x3"/>
   <p:notesSz cx="6858000" cy="9144000"/>
@@ -3261,7 +3269,7 @@
 </p:sld>
 </file>
 
-<file path=ppt/slides/slide2.xml><?xml version="1.0" encoding="utf-8"?>
+<file path=ppt/slides/slide10.xml><?xml version="1.0" encoding="utf-8"?>
 <p:sld xmlns:a="http://schemas.openxmlformats.org/drawingml/2006/main" xmlns:p="http://schemas.openxmlformats.org/presentationml/2006/main" xmlns:r="http://schemas.openxmlformats.org/officeDocument/2006/relationships">
   <p:cSld>
     <p:spTree>
@@ -3355,6 +3363,1422 @@
                 </a:solidFill>
               </a:rPr>
               <a:t>《植物的一生》 · TeachAny 互动课件</a:t>
+            </a:r>
+          </a:p>
+        </p:txBody>
+      </p:sp>
+    </p:spTree>
+  </p:cSld>
+  <p:clrMapOvr>
+    <a:masterClrMapping/>
+  </p:clrMapOvr>
+</p:sld>
+</file>
+
+<file path=ppt/slides/slide2.xml><?xml version="1.0" encoding="utf-8"?>
+<p:sld xmlns:a="http://schemas.openxmlformats.org/drawingml/2006/main" xmlns:p="http://schemas.openxmlformats.org/presentationml/2006/main" xmlns:r="http://schemas.openxmlformats.org/officeDocument/2006/relationships">
+  <p:cSld>
+    <p:spTree>
+      <p:nvGrpSpPr>
+        <p:cNvPr id="1" name=""/>
+        <p:cNvGrpSpPr/>
+        <p:nvPr/>
+      </p:nvGrpSpPr>
+      <p:grpSpPr/>
+      <p:sp>
+        <p:nvSpPr>
+          <p:cNvPr id="2" name="Rectangle 1"/>
+          <p:cNvSpPr/>
+          <p:nvPr/>
+        </p:nvSpPr>
+        <p:spPr>
+          <a:xfrm>
+            <a:off x="0" y="0"/>
+            <a:ext cx="12191695" cy="822960"/>
+          </a:xfrm>
+          <a:prstGeom prst="rect">
+            <a:avLst/>
+          </a:prstGeom>
+          <a:solidFill>
+            <a:srgbClr val="6366F1"/>
+          </a:solidFill>
+          <a:ln>
+            <a:noFill/>
+          </a:ln>
+        </p:spPr>
+        <p:style>
+          <a:lnRef idx="1">
+            <a:schemeClr val="accent1"/>
+          </a:lnRef>
+          <a:fillRef idx="3">
+            <a:schemeClr val="accent1"/>
+          </a:fillRef>
+          <a:effectRef idx="2">
+            <a:schemeClr val="accent1"/>
+          </a:effectRef>
+          <a:fontRef idx="minor">
+            <a:schemeClr val="lt1"/>
+          </a:fontRef>
+        </p:style>
+        <p:txBody>
+          <a:bodyPr rtlCol="0" anchor="ctr"/>
+          <a:lstStyle/>
+          <a:p>
+            <a:pPr algn="ctr"/>
+          </a:p>
+        </p:txBody>
+      </p:sp>
+      <p:sp>
+        <p:nvSpPr>
+          <p:cNvPr id="3" name="TextBox 2"/>
+          <p:cNvSpPr txBox="1"/>
+          <p:nvPr/>
+        </p:nvSpPr>
+        <p:spPr>
+          <a:xfrm>
+            <a:off x="457200" y="137160"/>
+            <a:ext cx="11277295" cy="548640"/>
+          </a:xfrm>
+          <a:prstGeom prst="rect">
+            <a:avLst/>
+          </a:prstGeom>
+          <a:noFill/>
+        </p:spPr>
+        <p:txBody>
+          <a:bodyPr wrap="square">
+            <a:spAutoFit/>
+          </a:bodyPr>
+          <a:lstStyle/>
+          <a:p>
+            <a:r>
+              <a:rPr sz="2600" b="1">
+                <a:solidFill>
+                  <a:srgbClr val="FFFFFF"/>
+                </a:solidFill>
+              </a:rPr>
+              <a:t>🌱 植物的一生 🌸</a:t>
+            </a:r>
+          </a:p>
+        </p:txBody>
+      </p:sp>
+      <p:sp>
+        <p:nvSpPr>
+          <p:cNvPr id="4" name="TextBox 3"/>
+          <p:cNvSpPr txBox="1"/>
+          <p:nvPr/>
+        </p:nvSpPr>
+        <p:spPr>
+          <a:xfrm>
+            <a:off x="457200" y="1097280"/>
+            <a:ext cx="11247120" cy="5029200"/>
+          </a:xfrm>
+          <a:prstGeom prst="rect">
+            <a:avLst/>
+          </a:prstGeom>
+          <a:noFill/>
+        </p:spPr>
+        <p:txBody>
+          <a:bodyPr wrap="square">
+            <a:spAutoFit/>
+          </a:bodyPr>
+          <a:lstStyle/>
+          <a:p>
+            <a:pPr algn="l">
+              <a:spcAft>
+                <a:spcPts val="600"/>
+              </a:spcAft>
+            </a:pPr>
+            <a:r>
+              <a:rPr sz="1600">
+                <a:solidFill>
+                  <a:srgbClr val="1E293B"/>
+                </a:solidFill>
+                <a:latin typeface="Microsoft YaHei"/>
+              </a:rPr>
+              <a:t>• 你知道一粒小小的种子，是怎样长成一株大植物的吗？</a:t>
+            </a:r>
+          </a:p>
+          <a:p>
+            <a:pPr algn="l">
+              <a:spcAft>
+                <a:spcPts val="600"/>
+              </a:spcAft>
+            </a:pPr>
+            <a:r>
+              <a:rPr sz="1600">
+                <a:solidFill>
+                  <a:srgbClr val="1E293B"/>
+                </a:solidFill>
+                <a:latin typeface="Microsoft YaHei"/>
+              </a:rPr>
+              <a:t>• 老师把绿豆放在湿纸巾里，三天后……</a:t>
+            </a:r>
+          </a:p>
+          <a:p>
+            <a:pPr algn="l">
+              <a:spcAft>
+                <a:spcPts val="600"/>
+              </a:spcAft>
+            </a:pPr>
+            <a:r>
+              <a:rPr sz="1600">
+                <a:solidFill>
+                  <a:srgbClr val="1E293B"/>
+                </a:solidFill>
+                <a:latin typeface="Microsoft YaHei"/>
+              </a:rPr>
+              <a:t>• 你能把植物的一生按正确顺序排列吗？</a:t>
+            </a:r>
+          </a:p>
+          <a:p>
+            <a:pPr algn="l">
+              <a:spcAft>
+                <a:spcPts val="600"/>
+              </a:spcAft>
+            </a:pPr>
+            <a:r>
+              <a:rPr sz="1600">
+                <a:solidFill>
+                  <a:srgbClr val="1E293B"/>
+                </a:solidFill>
+                <a:latin typeface="Microsoft YaHei"/>
+              </a:rPr>
+              <a:t>• （先想一想，等会儿我们一起来验证！）</a:t>
+            </a:r>
+          </a:p>
+        </p:txBody>
+      </p:sp>
+    </p:spTree>
+  </p:cSld>
+  <p:clrMapOvr>
+    <a:masterClrMapping/>
+  </p:clrMapOvr>
+</p:sld>
+</file>
+
+<file path=ppt/slides/slide3.xml><?xml version="1.0" encoding="utf-8"?>
+<p:sld xmlns:a="http://schemas.openxmlformats.org/drawingml/2006/main" xmlns:p="http://schemas.openxmlformats.org/presentationml/2006/main" xmlns:r="http://schemas.openxmlformats.org/officeDocument/2006/relationships">
+  <p:cSld>
+    <p:spTree>
+      <p:nvGrpSpPr>
+        <p:cNvPr id="1" name=""/>
+        <p:cNvGrpSpPr/>
+        <p:nvPr/>
+      </p:nvGrpSpPr>
+      <p:grpSpPr/>
+      <p:sp>
+        <p:nvSpPr>
+          <p:cNvPr id="2" name="Rectangle 1"/>
+          <p:cNvSpPr/>
+          <p:nvPr/>
+        </p:nvSpPr>
+        <p:spPr>
+          <a:xfrm>
+            <a:off x="0" y="0"/>
+            <a:ext cx="12191695" cy="822960"/>
+          </a:xfrm>
+          <a:prstGeom prst="rect">
+            <a:avLst/>
+          </a:prstGeom>
+          <a:solidFill>
+            <a:srgbClr val="6366F1"/>
+          </a:solidFill>
+          <a:ln>
+            <a:noFill/>
+          </a:ln>
+        </p:spPr>
+        <p:style>
+          <a:lnRef idx="1">
+            <a:schemeClr val="accent1"/>
+          </a:lnRef>
+          <a:fillRef idx="3">
+            <a:schemeClr val="accent1"/>
+          </a:fillRef>
+          <a:effectRef idx="2">
+            <a:schemeClr val="accent1"/>
+          </a:effectRef>
+          <a:fontRef idx="minor">
+            <a:schemeClr val="lt1"/>
+          </a:fontRef>
+        </p:style>
+        <p:txBody>
+          <a:bodyPr rtlCol="0" anchor="ctr"/>
+          <a:lstStyle/>
+          <a:p>
+            <a:pPr algn="ctr"/>
+          </a:p>
+        </p:txBody>
+      </p:sp>
+      <p:sp>
+        <p:nvSpPr>
+          <p:cNvPr id="3" name="TextBox 2"/>
+          <p:cNvSpPr txBox="1"/>
+          <p:nvPr/>
+        </p:nvSpPr>
+        <p:spPr>
+          <a:xfrm>
+            <a:off x="457200" y="137160"/>
+            <a:ext cx="11277295" cy="548640"/>
+          </a:xfrm>
+          <a:prstGeom prst="rect">
+            <a:avLst/>
+          </a:prstGeom>
+          <a:noFill/>
+        </p:spPr>
+        <p:txBody>
+          <a:bodyPr wrap="square">
+            <a:spAutoFit/>
+          </a:bodyPr>
+          <a:lstStyle/>
+          <a:p>
+            <a:r>
+              <a:rPr sz="2600" b="1">
+                <a:solidFill>
+                  <a:srgbClr val="FFFFFF"/>
+                </a:solidFill>
+              </a:rPr>
+              <a:t>🌰 猜一猜</a:t>
+            </a:r>
+          </a:p>
+        </p:txBody>
+      </p:sp>
+      <p:sp>
+        <p:nvSpPr>
+          <p:cNvPr id="4" name="TextBox 3"/>
+          <p:cNvSpPr txBox="1"/>
+          <p:nvPr/>
+        </p:nvSpPr>
+        <p:spPr>
+          <a:xfrm>
+            <a:off x="457200" y="1097280"/>
+            <a:ext cx="11247120" cy="5029200"/>
+          </a:xfrm>
+          <a:prstGeom prst="rect">
+            <a:avLst/>
+          </a:prstGeom>
+          <a:noFill/>
+        </p:spPr>
+        <p:txBody>
+          <a:bodyPr wrap="square">
+            <a:spAutoFit/>
+          </a:bodyPr>
+          <a:lstStyle/>
+          <a:p>
+            <a:pPr algn="l">
+              <a:spcAft>
+                <a:spcPts val="600"/>
+              </a:spcAft>
+            </a:pPr>
+            <a:r>
+              <a:rPr sz="1600">
+                <a:solidFill>
+                  <a:srgbClr val="1E293B"/>
+                </a:solidFill>
+                <a:latin typeface="Microsoft YaHei"/>
+              </a:rPr>
+              <a:t>• 老师把绿豆放在湿纸巾里，三天后……</a:t>
+            </a:r>
+          </a:p>
+          <a:p>
+            <a:pPr algn="l">
+              <a:spcAft>
+                <a:spcPts val="600"/>
+              </a:spcAft>
+            </a:pPr>
+            <a:r>
+              <a:rPr sz="1600">
+                <a:solidFill>
+                  <a:srgbClr val="1E293B"/>
+                </a:solidFill>
+                <a:latin typeface="Microsoft YaHei"/>
+              </a:rPr>
+              <a:t>• 你能把植物的一生按正确顺序排列吗？</a:t>
+            </a:r>
+          </a:p>
+          <a:p>
+            <a:pPr algn="l">
+              <a:spcAft>
+                <a:spcPts val="600"/>
+              </a:spcAft>
+            </a:pPr>
+            <a:r>
+              <a:rPr sz="1600">
+                <a:solidFill>
+                  <a:srgbClr val="1E293B"/>
+                </a:solidFill>
+                <a:latin typeface="Microsoft YaHei"/>
+              </a:rPr>
+              <a:t>• （先想一想，等会儿我们一起来验证！）</a:t>
+            </a:r>
+          </a:p>
+        </p:txBody>
+      </p:sp>
+    </p:spTree>
+  </p:cSld>
+  <p:clrMapOvr>
+    <a:masterClrMapping/>
+  </p:clrMapOvr>
+</p:sld>
+</file>
+
+<file path=ppt/slides/slide4.xml><?xml version="1.0" encoding="utf-8"?>
+<p:sld xmlns:a="http://schemas.openxmlformats.org/drawingml/2006/main" xmlns:p="http://schemas.openxmlformats.org/presentationml/2006/main" xmlns:r="http://schemas.openxmlformats.org/officeDocument/2006/relationships">
+  <p:cSld>
+    <p:spTree>
+      <p:nvGrpSpPr>
+        <p:cNvPr id="1" name=""/>
+        <p:cNvGrpSpPr/>
+        <p:nvPr/>
+      </p:nvGrpSpPr>
+      <p:grpSpPr/>
+      <p:sp>
+        <p:nvSpPr>
+          <p:cNvPr id="2" name="Rectangle 1"/>
+          <p:cNvSpPr/>
+          <p:nvPr/>
+        </p:nvSpPr>
+        <p:spPr>
+          <a:xfrm>
+            <a:off x="0" y="0"/>
+            <a:ext cx="12191695" cy="822960"/>
+          </a:xfrm>
+          <a:prstGeom prst="rect">
+            <a:avLst/>
+          </a:prstGeom>
+          <a:solidFill>
+            <a:srgbClr val="6366F1"/>
+          </a:solidFill>
+          <a:ln>
+            <a:noFill/>
+          </a:ln>
+        </p:spPr>
+        <p:style>
+          <a:lnRef idx="1">
+            <a:schemeClr val="accent1"/>
+          </a:lnRef>
+          <a:fillRef idx="3">
+            <a:schemeClr val="accent1"/>
+          </a:fillRef>
+          <a:effectRef idx="2">
+            <a:schemeClr val="accent1"/>
+          </a:effectRef>
+          <a:fontRef idx="minor">
+            <a:schemeClr val="lt1"/>
+          </a:fontRef>
+        </p:style>
+        <p:txBody>
+          <a:bodyPr rtlCol="0" anchor="ctr"/>
+          <a:lstStyle/>
+          <a:p>
+            <a:pPr algn="ctr"/>
+          </a:p>
+        </p:txBody>
+      </p:sp>
+      <p:sp>
+        <p:nvSpPr>
+          <p:cNvPr id="3" name="TextBox 2"/>
+          <p:cNvSpPr txBox="1"/>
+          <p:nvPr/>
+        </p:nvSpPr>
+        <p:spPr>
+          <a:xfrm>
+            <a:off x="457200" y="137160"/>
+            <a:ext cx="11277295" cy="548640"/>
+          </a:xfrm>
+          <a:prstGeom prst="rect">
+            <a:avLst/>
+          </a:prstGeom>
+          <a:noFill/>
+        </p:spPr>
+        <p:txBody>
+          <a:bodyPr wrap="square">
+            <a:spAutoFit/>
+          </a:bodyPr>
+          <a:lstStyle/>
+          <a:p>
+            <a:r>
+              <a:rPr sz="2600" b="1">
+                <a:solidFill>
+                  <a:srgbClr val="FFFFFF"/>
+                </a:solidFill>
+              </a:rPr>
+              <a:t>🔍 探索：点击认识每个阶段！</a:t>
+            </a:r>
+          </a:p>
+        </p:txBody>
+      </p:sp>
+      <p:sp>
+        <p:nvSpPr>
+          <p:cNvPr id="4" name="TextBox 3"/>
+          <p:cNvSpPr txBox="1"/>
+          <p:nvPr/>
+        </p:nvSpPr>
+        <p:spPr>
+          <a:xfrm>
+            <a:off x="457200" y="1097280"/>
+            <a:ext cx="11247120" cy="5029200"/>
+          </a:xfrm>
+          <a:prstGeom prst="rect">
+            <a:avLst/>
+          </a:prstGeom>
+          <a:noFill/>
+        </p:spPr>
+        <p:txBody>
+          <a:bodyPr wrap="square">
+            <a:spAutoFit/>
+          </a:bodyPr>
+          <a:lstStyle/>
+          <a:p>
+            <a:pPr algn="l">
+              <a:spcAft>
+                <a:spcPts val="600"/>
+              </a:spcAft>
+            </a:pPr>
+            <a:r>
+              <a:rPr sz="1600">
+                <a:solidFill>
+                  <a:srgbClr val="1E293B"/>
+                </a:solidFill>
+                <a:latin typeface="Microsoft YaHei"/>
+              </a:rPr>
+              <a:t>• 植物的一生有 6 个重要阶段，点击下面的卡片，看看每个阶段发生了什么！</a:t>
+            </a:r>
+          </a:p>
+        </p:txBody>
+      </p:sp>
+    </p:spTree>
+  </p:cSld>
+  <p:clrMapOvr>
+    <a:masterClrMapping/>
+  </p:clrMapOvr>
+</p:sld>
+</file>
+
+<file path=ppt/slides/slide5.xml><?xml version="1.0" encoding="utf-8"?>
+<p:sld xmlns:a="http://schemas.openxmlformats.org/drawingml/2006/main" xmlns:p="http://schemas.openxmlformats.org/presentationml/2006/main" xmlns:r="http://schemas.openxmlformats.org/officeDocument/2006/relationships">
+  <p:cSld>
+    <p:spTree>
+      <p:nvGrpSpPr>
+        <p:cNvPr id="1" name=""/>
+        <p:cNvGrpSpPr/>
+        <p:nvPr/>
+      </p:nvGrpSpPr>
+      <p:grpSpPr/>
+      <p:sp>
+        <p:nvSpPr>
+          <p:cNvPr id="2" name="Rectangle 1"/>
+          <p:cNvSpPr/>
+          <p:nvPr/>
+        </p:nvSpPr>
+        <p:spPr>
+          <a:xfrm>
+            <a:off x="0" y="0"/>
+            <a:ext cx="12191695" cy="822960"/>
+          </a:xfrm>
+          <a:prstGeom prst="rect">
+            <a:avLst/>
+          </a:prstGeom>
+          <a:solidFill>
+            <a:srgbClr val="6366F1"/>
+          </a:solidFill>
+          <a:ln>
+            <a:noFill/>
+          </a:ln>
+        </p:spPr>
+        <p:style>
+          <a:lnRef idx="1">
+            <a:schemeClr val="accent1"/>
+          </a:lnRef>
+          <a:fillRef idx="3">
+            <a:schemeClr val="accent1"/>
+          </a:fillRef>
+          <a:effectRef idx="2">
+            <a:schemeClr val="accent1"/>
+          </a:effectRef>
+          <a:fontRef idx="minor">
+            <a:schemeClr val="lt1"/>
+          </a:fontRef>
+        </p:style>
+        <p:txBody>
+          <a:bodyPr rtlCol="0" anchor="ctr"/>
+          <a:lstStyle/>
+          <a:p>
+            <a:pPr algn="ctr"/>
+          </a:p>
+        </p:txBody>
+      </p:sp>
+      <p:sp>
+        <p:nvSpPr>
+          <p:cNvPr id="3" name="TextBox 2"/>
+          <p:cNvSpPr txBox="1"/>
+          <p:nvPr/>
+        </p:nvSpPr>
+        <p:spPr>
+          <a:xfrm>
+            <a:off x="457200" y="137160"/>
+            <a:ext cx="11277295" cy="548640"/>
+          </a:xfrm>
+          <a:prstGeom prst="rect">
+            <a:avLst/>
+          </a:prstGeom>
+          <a:noFill/>
+        </p:spPr>
+        <p:txBody>
+          <a:bodyPr wrap="square">
+            <a:spAutoFit/>
+          </a:bodyPr>
+          <a:lstStyle/>
+          <a:p>
+            <a:r>
+              <a:rPr sz="2600" b="1">
+                <a:solidFill>
+                  <a:srgbClr val="FFFFFF"/>
+                </a:solidFill>
+              </a:rPr>
+              <a:t>📖 学习：植物一生的 6 个阶段</a:t>
+            </a:r>
+          </a:p>
+        </p:txBody>
+      </p:sp>
+      <p:sp>
+        <p:nvSpPr>
+          <p:cNvPr id="4" name="TextBox 3"/>
+          <p:cNvSpPr txBox="1"/>
+          <p:nvPr/>
+        </p:nvSpPr>
+        <p:spPr>
+          <a:xfrm>
+            <a:off x="457200" y="1097280"/>
+            <a:ext cx="11247120" cy="5029200"/>
+          </a:xfrm>
+          <a:prstGeom prst="rect">
+            <a:avLst/>
+          </a:prstGeom>
+          <a:noFill/>
+        </p:spPr>
+        <p:txBody>
+          <a:bodyPr wrap="square">
+            <a:spAutoFit/>
+          </a:bodyPr>
+          <a:lstStyle/>
+          <a:p>
+            <a:pPr algn="l">
+              <a:spcAft>
+                <a:spcPts val="600"/>
+              </a:spcAft>
+            </a:pPr>
+            <a:r>
+              <a:rPr sz="1600">
+                <a:solidFill>
+                  <a:srgbClr val="1E293B"/>
+                </a:solidFill>
+                <a:latin typeface="Microsoft YaHei"/>
+              </a:rPr>
+              <a:t>• 1️⃣ 种子阶段 🫘</a:t>
+            </a:r>
+          </a:p>
+          <a:p>
+            <a:pPr algn="l">
+              <a:spcAft>
+                <a:spcPts val="600"/>
+              </a:spcAft>
+            </a:pPr>
+            <a:r>
+              <a:rPr sz="1600">
+                <a:solidFill>
+                  <a:srgbClr val="1E293B"/>
+                </a:solidFill>
+                <a:latin typeface="Microsoft YaHei"/>
+              </a:rPr>
+              <a:t>• 种子就像植物的"小宝宝"。它有坚硬的外壳保护着，里面藏着胚根、胚芽和营养物质。</a:t>
+            </a:r>
+          </a:p>
+          <a:p>
+            <a:pPr algn="l">
+              <a:spcAft>
+                <a:spcPts val="600"/>
+              </a:spcAft>
+            </a:pPr>
+            <a:r>
+              <a:rPr sz="1600">
+                <a:solidFill>
+                  <a:srgbClr val="1E293B"/>
+                </a:solidFill>
+                <a:latin typeface="Microsoft YaHei"/>
+              </a:rPr>
+              <a:t>• 🌡️ 需要：适宜的温度、水分、空气</a:t>
+            </a:r>
+          </a:p>
+          <a:p>
+            <a:pPr algn="l">
+              <a:spcAft>
+                <a:spcPts val="600"/>
+              </a:spcAft>
+            </a:pPr>
+            <a:r>
+              <a:rPr sz="1600">
+                <a:solidFill>
+                  <a:srgbClr val="1E293B"/>
+                </a:solidFill>
+                <a:latin typeface="Microsoft YaHei"/>
+              </a:rPr>
+              <a:t>• 😴 有趣：有些种子可以在土里"睡觉"很多年，遇到合适的条件才发芽！</a:t>
+            </a:r>
+          </a:p>
+          <a:p>
+            <a:pPr algn="l">
+              <a:spcAft>
+                <a:spcPts val="600"/>
+              </a:spcAft>
+            </a:pPr>
+            <a:r>
+              <a:rPr sz="1600">
+                <a:solidFill>
+                  <a:srgbClr val="1E293B"/>
+                </a:solidFill>
+                <a:latin typeface="Microsoft YaHei"/>
+              </a:rPr>
+              <a:t>• 2️⃣ 发芽阶段 🌱</a:t>
+            </a:r>
+          </a:p>
+          <a:p>
+            <a:pPr algn="l">
+              <a:spcAft>
+                <a:spcPts val="600"/>
+              </a:spcAft>
+            </a:pPr>
+            <a:r>
+              <a:rPr sz="1600">
+                <a:solidFill>
+                  <a:srgbClr val="1E293B"/>
+                </a:solidFill>
+                <a:latin typeface="Microsoft YaHei"/>
+              </a:rPr>
+              <a:t>• 种子"醒过来"了！胚根先长出来，向下扎进土里；然后胚芽向上，钻出地面。</a:t>
+            </a:r>
+          </a:p>
+          <a:p>
+            <a:pPr algn="l">
+              <a:spcAft>
+                <a:spcPts val="600"/>
+              </a:spcAft>
+            </a:pPr>
+            <a:r>
+              <a:rPr sz="1600">
+                <a:solidFill>
+                  <a:srgbClr val="1E293B"/>
+                </a:solidFill>
+                <a:latin typeface="Microsoft YaHei"/>
+              </a:rPr>
+              <a:t>• 🔍 你注意到了吗：先长根，再长芽——这样小苗才能站稳！</a:t>
+            </a:r>
+          </a:p>
+          <a:p>
+            <a:pPr algn="l">
+              <a:spcAft>
+                <a:spcPts val="600"/>
+              </a:spcAft>
+            </a:pPr>
+            <a:r>
+              <a:rPr sz="1600">
+                <a:solidFill>
+                  <a:srgbClr val="1E293B"/>
+                </a:solidFill>
+                <a:latin typeface="Microsoft YaHei"/>
+              </a:rPr>
+              <a:t>• 3️⃣ 幼苗阶段 🌿</a:t>
+            </a:r>
+          </a:p>
+          <a:p>
+            <a:pPr algn="l">
+              <a:spcAft>
+                <a:spcPts val="600"/>
+              </a:spcAft>
+            </a:pPr>
+            <a:r>
+              <a:rPr sz="1600">
+                <a:solidFill>
+                  <a:srgbClr val="1E293B"/>
+                </a:solidFill>
+                <a:latin typeface="Microsoft YaHei"/>
+              </a:rPr>
+              <a:t>• 小苗长出真叶了！它开始用阳光、水和空气"做食物"（光合作用）。</a:t>
+            </a:r>
+          </a:p>
+          <a:p>
+            <a:pPr algn="l">
+              <a:spcAft>
+                <a:spcPts val="600"/>
+              </a:spcAft>
+            </a:pPr>
+            <a:r>
+              <a:rPr sz="1600">
+                <a:solidFill>
+                  <a:srgbClr val="1E293B"/>
+                </a:solidFill>
+                <a:latin typeface="Microsoft YaHei"/>
+              </a:rPr>
+              <a:t>• ☀️ 这个阶段植物最需要阳光，不然会"变瘦"（徒长）。</a:t>
+            </a:r>
+          </a:p>
+        </p:txBody>
+      </p:sp>
+    </p:spTree>
+  </p:cSld>
+  <p:clrMapOvr>
+    <a:masterClrMapping/>
+  </p:clrMapOvr>
+</p:sld>
+</file>
+
+<file path=ppt/slides/slide6.xml><?xml version="1.0" encoding="utf-8"?>
+<p:sld xmlns:a="http://schemas.openxmlformats.org/drawingml/2006/main" xmlns:p="http://schemas.openxmlformats.org/presentationml/2006/main" xmlns:r="http://schemas.openxmlformats.org/officeDocument/2006/relationships">
+  <p:cSld>
+    <p:spTree>
+      <p:nvGrpSpPr>
+        <p:cNvPr id="1" name=""/>
+        <p:cNvGrpSpPr/>
+        <p:nvPr/>
+      </p:nvGrpSpPr>
+      <p:grpSpPr/>
+      <p:sp>
+        <p:nvSpPr>
+          <p:cNvPr id="2" name="Rectangle 1"/>
+          <p:cNvSpPr/>
+          <p:nvPr/>
+        </p:nvSpPr>
+        <p:spPr>
+          <a:xfrm>
+            <a:off x="0" y="0"/>
+            <a:ext cx="12191695" cy="822960"/>
+          </a:xfrm>
+          <a:prstGeom prst="rect">
+            <a:avLst/>
+          </a:prstGeom>
+          <a:solidFill>
+            <a:srgbClr val="6366F1"/>
+          </a:solidFill>
+          <a:ln>
+            <a:noFill/>
+          </a:ln>
+        </p:spPr>
+        <p:style>
+          <a:lnRef idx="1">
+            <a:schemeClr val="accent1"/>
+          </a:lnRef>
+          <a:fillRef idx="3">
+            <a:schemeClr val="accent1"/>
+          </a:fillRef>
+          <a:effectRef idx="2">
+            <a:schemeClr val="accent1"/>
+          </a:effectRef>
+          <a:fontRef idx="minor">
+            <a:schemeClr val="lt1"/>
+          </a:fontRef>
+        </p:style>
+        <p:txBody>
+          <a:bodyPr rtlCol="0" anchor="ctr"/>
+          <a:lstStyle/>
+          <a:p>
+            <a:pPr algn="ctr"/>
+          </a:p>
+        </p:txBody>
+      </p:sp>
+      <p:sp>
+        <p:nvSpPr>
+          <p:cNvPr id="3" name="TextBox 2"/>
+          <p:cNvSpPr txBox="1"/>
+          <p:nvPr/>
+        </p:nvSpPr>
+        <p:spPr>
+          <a:xfrm>
+            <a:off x="457200" y="137160"/>
+            <a:ext cx="11277295" cy="548640"/>
+          </a:xfrm>
+          <a:prstGeom prst="rect">
+            <a:avLst/>
+          </a:prstGeom>
+          <a:noFill/>
+        </p:spPr>
+        <p:txBody>
+          <a:bodyPr wrap="square">
+            <a:spAutoFit/>
+          </a:bodyPr>
+          <a:lstStyle/>
+          <a:p>
+            <a:r>
+              <a:rPr sz="2600" b="1">
+                <a:solidFill>
+                  <a:srgbClr val="FFFFFF"/>
+                </a:solidFill>
+              </a:rPr>
+              <a:t>📖 学习：植物一生的 6 个阶段（续）</a:t>
+            </a:r>
+          </a:p>
+        </p:txBody>
+      </p:sp>
+      <p:sp>
+        <p:nvSpPr>
+          <p:cNvPr id="4" name="TextBox 3"/>
+          <p:cNvSpPr txBox="1"/>
+          <p:nvPr/>
+        </p:nvSpPr>
+        <p:spPr>
+          <a:xfrm>
+            <a:off x="457200" y="1097280"/>
+            <a:ext cx="11247120" cy="5029200"/>
+          </a:xfrm>
+          <a:prstGeom prst="rect">
+            <a:avLst/>
+          </a:prstGeom>
+          <a:noFill/>
+        </p:spPr>
+        <p:txBody>
+          <a:bodyPr wrap="square">
+            <a:spAutoFit/>
+          </a:bodyPr>
+          <a:lstStyle/>
+          <a:p>
+            <a:pPr algn="l">
+              <a:spcAft>
+                <a:spcPts val="600"/>
+              </a:spcAft>
+            </a:pPr>
+            <a:r>
+              <a:rPr sz="1600">
+                <a:solidFill>
+                  <a:srgbClr val="1E293B"/>
+                </a:solidFill>
+                <a:latin typeface="Microsoft YaHei"/>
+              </a:rPr>
+              <a:t>• 4️⃣ 成熟阶段 🌳</a:t>
+            </a:r>
+          </a:p>
+          <a:p>
+            <a:pPr algn="l">
+              <a:spcAft>
+                <a:spcPts val="600"/>
+              </a:spcAft>
+            </a:pPr>
+            <a:r>
+              <a:rPr sz="1600">
+                <a:solidFill>
+                  <a:srgbClr val="1E293B"/>
+                </a:solidFill>
+                <a:latin typeface="Microsoft YaHei"/>
+              </a:rPr>
+              <a:t>• 植物长大了！茎变得粗壮，叶子茂密，准备好开花结果了。</a:t>
+            </a:r>
+          </a:p>
+        </p:txBody>
+      </p:sp>
+    </p:spTree>
+  </p:cSld>
+  <p:clrMapOvr>
+    <a:masterClrMapping/>
+  </p:clrMapOvr>
+</p:sld>
+</file>
+
+<file path=ppt/slides/slide7.xml><?xml version="1.0" encoding="utf-8"?>
+<p:sld xmlns:a="http://schemas.openxmlformats.org/drawingml/2006/main" xmlns:p="http://schemas.openxmlformats.org/presentationml/2006/main" xmlns:r="http://schemas.openxmlformats.org/officeDocument/2006/relationships">
+  <p:cSld>
+    <p:spTree>
+      <p:nvGrpSpPr>
+        <p:cNvPr id="1" name=""/>
+        <p:cNvGrpSpPr/>
+        <p:nvPr/>
+      </p:nvGrpSpPr>
+      <p:grpSpPr/>
+      <p:sp>
+        <p:nvSpPr>
+          <p:cNvPr id="2" name="Rectangle 1"/>
+          <p:cNvSpPr/>
+          <p:nvPr/>
+        </p:nvSpPr>
+        <p:spPr>
+          <a:xfrm>
+            <a:off x="0" y="0"/>
+            <a:ext cx="12191695" cy="822960"/>
+          </a:xfrm>
+          <a:prstGeom prst="rect">
+            <a:avLst/>
+          </a:prstGeom>
+          <a:solidFill>
+            <a:srgbClr val="6366F1"/>
+          </a:solidFill>
+          <a:ln>
+            <a:noFill/>
+          </a:ln>
+        </p:spPr>
+        <p:style>
+          <a:lnRef idx="1">
+            <a:schemeClr val="accent1"/>
+          </a:lnRef>
+          <a:fillRef idx="3">
+            <a:schemeClr val="accent1"/>
+          </a:fillRef>
+          <a:effectRef idx="2">
+            <a:schemeClr val="accent1"/>
+          </a:effectRef>
+          <a:fontRef idx="minor">
+            <a:schemeClr val="lt1"/>
+          </a:fontRef>
+        </p:style>
+        <p:txBody>
+          <a:bodyPr rtlCol="0" anchor="ctr"/>
+          <a:lstStyle/>
+          <a:p>
+            <a:pPr algn="ctr"/>
+          </a:p>
+        </p:txBody>
+      </p:sp>
+      <p:sp>
+        <p:nvSpPr>
+          <p:cNvPr id="3" name="TextBox 2"/>
+          <p:cNvSpPr txBox="1"/>
+          <p:nvPr/>
+        </p:nvSpPr>
+        <p:spPr>
+          <a:xfrm>
+            <a:off x="457200" y="137160"/>
+            <a:ext cx="11277295" cy="548640"/>
+          </a:xfrm>
+          <a:prstGeom prst="rect">
+            <a:avLst/>
+          </a:prstGeom>
+          <a:noFill/>
+        </p:spPr>
+        <p:txBody>
+          <a:bodyPr wrap="square">
+            <a:spAutoFit/>
+          </a:bodyPr>
+          <a:lstStyle/>
+          <a:p>
+            <a:r>
+              <a:rPr sz="2600" b="1">
+                <a:solidFill>
+                  <a:srgbClr val="FFFFFF"/>
+                </a:solidFill>
+              </a:rPr>
+              <a:t>🎮 练习：帮植物排排队！</a:t>
+            </a:r>
+          </a:p>
+        </p:txBody>
+      </p:sp>
+      <p:sp>
+        <p:nvSpPr>
+          <p:cNvPr id="4" name="TextBox 3"/>
+          <p:cNvSpPr txBox="1"/>
+          <p:nvPr/>
+        </p:nvSpPr>
+        <p:spPr>
+          <a:xfrm>
+            <a:off x="457200" y="1097280"/>
+            <a:ext cx="11247120" cy="5029200"/>
+          </a:xfrm>
+          <a:prstGeom prst="rect">
+            <a:avLst/>
+          </a:prstGeom>
+          <a:noFill/>
+        </p:spPr>
+        <p:txBody>
+          <a:bodyPr wrap="square">
+            <a:spAutoFit/>
+          </a:bodyPr>
+          <a:lstStyle/>
+          <a:p>
+            <a:pPr algn="l">
+              <a:spcAft>
+                <a:spcPts val="600"/>
+              </a:spcAft>
+            </a:pPr>
+            <a:r>
+              <a:rPr sz="1600">
+                <a:solidFill>
+                  <a:srgbClr val="1E293B"/>
+                </a:solidFill>
+                <a:latin typeface="Microsoft YaHei"/>
+              </a:rPr>
+              <a:t>• 把下面的阶段拖拽到正确的顺序位置（1=最开始，6=最后）。</a:t>
+            </a:r>
+          </a:p>
+        </p:txBody>
+      </p:sp>
+    </p:spTree>
+  </p:cSld>
+  <p:clrMapOvr>
+    <a:masterClrMapping/>
+  </p:clrMapOvr>
+</p:sld>
+</file>
+
+<file path=ppt/slides/slide8.xml><?xml version="1.0" encoding="utf-8"?>
+<p:sld xmlns:a="http://schemas.openxmlformats.org/drawingml/2006/main" xmlns:p="http://schemas.openxmlformats.org/presentationml/2006/main" xmlns:r="http://schemas.openxmlformats.org/officeDocument/2006/relationships">
+  <p:cSld>
+    <p:spTree>
+      <p:nvGrpSpPr>
+        <p:cNvPr id="1" name=""/>
+        <p:cNvGrpSpPr/>
+        <p:nvPr/>
+      </p:nvGrpSpPr>
+      <p:grpSpPr/>
+      <p:sp>
+        <p:nvSpPr>
+          <p:cNvPr id="2" name="Rectangle 1"/>
+          <p:cNvSpPr/>
+          <p:nvPr/>
+        </p:nvSpPr>
+        <p:spPr>
+          <a:xfrm>
+            <a:off x="0" y="0"/>
+            <a:ext cx="12191695" cy="822960"/>
+          </a:xfrm>
+          <a:prstGeom prst="rect">
+            <a:avLst/>
+          </a:prstGeom>
+          <a:solidFill>
+            <a:srgbClr val="6366F1"/>
+          </a:solidFill>
+          <a:ln>
+            <a:noFill/>
+          </a:ln>
+        </p:spPr>
+        <p:style>
+          <a:lnRef idx="1">
+            <a:schemeClr val="accent1"/>
+          </a:lnRef>
+          <a:fillRef idx="3">
+            <a:schemeClr val="accent1"/>
+          </a:fillRef>
+          <a:effectRef idx="2">
+            <a:schemeClr val="accent1"/>
+          </a:effectRef>
+          <a:fontRef idx="minor">
+            <a:schemeClr val="lt1"/>
+          </a:fontRef>
+        </p:style>
+        <p:txBody>
+          <a:bodyPr rtlCol="0" anchor="ctr"/>
+          <a:lstStyle/>
+          <a:p>
+            <a:pPr algn="ctr"/>
+          </a:p>
+        </p:txBody>
+      </p:sp>
+      <p:sp>
+        <p:nvSpPr>
+          <p:cNvPr id="3" name="TextBox 2"/>
+          <p:cNvSpPr txBox="1"/>
+          <p:nvPr/>
+        </p:nvSpPr>
+        <p:spPr>
+          <a:xfrm>
+            <a:off x="457200" y="137160"/>
+            <a:ext cx="11277295" cy="548640"/>
+          </a:xfrm>
+          <a:prstGeom prst="rect">
+            <a:avLst/>
+          </a:prstGeom>
+          <a:noFill/>
+        </p:spPr>
+        <p:txBody>
+          <a:bodyPr wrap="square">
+            <a:spAutoFit/>
+          </a:bodyPr>
+          <a:lstStyle/>
+          <a:p>
+            <a:r>
+              <a:rPr sz="2600" b="1">
+                <a:solidFill>
+                  <a:srgbClr val="FFFFFF"/>
+                </a:solidFill>
+              </a:rPr>
+              <a:t>🧠 挑战：植物部位的功能</a:t>
+            </a:r>
+          </a:p>
+        </p:txBody>
+      </p:sp>
+      <p:sp>
+        <p:nvSpPr>
+          <p:cNvPr id="4" name="TextBox 3"/>
+          <p:cNvSpPr txBox="1"/>
+          <p:nvPr/>
+        </p:nvSpPr>
+        <p:spPr>
+          <a:xfrm>
+            <a:off x="457200" y="1097280"/>
+            <a:ext cx="11247120" cy="5029200"/>
+          </a:xfrm>
+          <a:prstGeom prst="rect">
+            <a:avLst/>
+          </a:prstGeom>
+          <a:noFill/>
+        </p:spPr>
+        <p:txBody>
+          <a:bodyPr wrap="square">
+            <a:spAutoFit/>
+          </a:bodyPr>
+          <a:lstStyle/>
+          <a:p>
+            <a:pPr algn="l">
+              <a:spcAft>
+                <a:spcPts val="600"/>
+              </a:spcAft>
+            </a:pPr>
+            <a:r>
+              <a:rPr sz="1600">
+                <a:solidFill>
+                  <a:srgbClr val="1E293B"/>
+                </a:solidFill>
+                <a:latin typeface="Microsoft YaHei"/>
+              </a:rPr>
+              <a:t>• 每个部位都有自己的工作，来认识一下吧！</a:t>
+            </a:r>
+          </a:p>
+          <a:p>
+            <a:pPr algn="l">
+              <a:spcAft>
+                <a:spcPts val="600"/>
+              </a:spcAft>
+            </a:pPr>
+            <a:r>
+              <a:rPr sz="1600">
+                <a:solidFill>
+                  <a:srgbClr val="1E293B"/>
+                </a:solidFill>
+                <a:latin typeface="Microsoft YaHei"/>
+              </a:rPr>
+              <a:t>• 📝 小测验</a:t>
+            </a:r>
+          </a:p>
+          <a:p>
+            <a:pPr algn="l">
+              <a:spcAft>
+                <a:spcPts val="600"/>
+              </a:spcAft>
+            </a:pPr>
+            <a:r>
+              <a:rPr sz="1600">
+                <a:solidFill>
+                  <a:srgbClr val="1E293B"/>
+                </a:solidFill>
+                <a:latin typeface="Microsoft YaHei"/>
+              </a:rPr>
+              <a:t>• 1. 植物长大后，哪个部位负责"做食物"？</a:t>
+            </a:r>
+          </a:p>
+          <a:p>
+            <a:pPr algn="l">
+              <a:spcAft>
+                <a:spcPts val="600"/>
+              </a:spcAft>
+            </a:pPr>
+            <a:r>
+              <a:rPr sz="1600">
+                <a:solidFill>
+                  <a:srgbClr val="1E293B"/>
+                </a:solidFill>
+                <a:latin typeface="Microsoft YaHei"/>
+              </a:rPr>
+              <a:t>• 2. 蜜蜂来花里采蜜，对植物有什么好处？</a:t>
+            </a:r>
+          </a:p>
+        </p:txBody>
+      </p:sp>
+    </p:spTree>
+  </p:cSld>
+  <p:clrMapOvr>
+    <a:masterClrMapping/>
+  </p:clrMapOvr>
+</p:sld>
+</file>
+
+<file path=ppt/slides/slide9.xml><?xml version="1.0" encoding="utf-8"?>
+<p:sld xmlns:a="http://schemas.openxmlformats.org/drawingml/2006/main" xmlns:p="http://schemas.openxmlformats.org/presentationml/2006/main" xmlns:r="http://schemas.openxmlformats.org/officeDocument/2006/relationships">
+  <p:cSld>
+    <p:spTree>
+      <p:nvGrpSpPr>
+        <p:cNvPr id="1" name=""/>
+        <p:cNvGrpSpPr/>
+        <p:nvPr/>
+      </p:nvGrpSpPr>
+      <p:grpSpPr/>
+      <p:sp>
+        <p:nvSpPr>
+          <p:cNvPr id="2" name="Rectangle 1"/>
+          <p:cNvSpPr/>
+          <p:nvPr/>
+        </p:nvSpPr>
+        <p:spPr>
+          <a:xfrm>
+            <a:off x="0" y="0"/>
+            <a:ext cx="12191695" cy="822960"/>
+          </a:xfrm>
+          <a:prstGeom prst="rect">
+            <a:avLst/>
+          </a:prstGeom>
+          <a:solidFill>
+            <a:srgbClr val="6366F1"/>
+          </a:solidFill>
+          <a:ln>
+            <a:noFill/>
+          </a:ln>
+        </p:spPr>
+        <p:style>
+          <a:lnRef idx="1">
+            <a:schemeClr val="accent1"/>
+          </a:lnRef>
+          <a:fillRef idx="3">
+            <a:schemeClr val="accent1"/>
+          </a:fillRef>
+          <a:effectRef idx="2">
+            <a:schemeClr val="accent1"/>
+          </a:effectRef>
+          <a:fontRef idx="minor">
+            <a:schemeClr val="lt1"/>
+          </a:fontRef>
+        </p:style>
+        <p:txBody>
+          <a:bodyPr rtlCol="0" anchor="ctr"/>
+          <a:lstStyle/>
+          <a:p>
+            <a:pPr algn="ctr"/>
+          </a:p>
+        </p:txBody>
+      </p:sp>
+      <p:sp>
+        <p:nvSpPr>
+          <p:cNvPr id="3" name="TextBox 2"/>
+          <p:cNvSpPr txBox="1"/>
+          <p:nvPr/>
+        </p:nvSpPr>
+        <p:spPr>
+          <a:xfrm>
+            <a:off x="457200" y="137160"/>
+            <a:ext cx="11277295" cy="548640"/>
+          </a:xfrm>
+          <a:prstGeom prst="rect">
+            <a:avLst/>
+          </a:prstGeom>
+          <a:noFill/>
+        </p:spPr>
+        <p:txBody>
+          <a:bodyPr wrap="square">
+            <a:spAutoFit/>
+          </a:bodyPr>
+          <a:lstStyle/>
+          <a:p>
+            <a:r>
+              <a:rPr sz="2600" b="1">
+                <a:solidFill>
+                  <a:srgbClr val="FFFFFF"/>
+                </a:solidFill>
+              </a:rPr>
+              <a:t>🎉 恭喜你完成学习！</a:t>
+            </a:r>
+          </a:p>
+        </p:txBody>
+      </p:sp>
+      <p:sp>
+        <p:nvSpPr>
+          <p:cNvPr id="4" name="TextBox 3"/>
+          <p:cNvSpPr txBox="1"/>
+          <p:nvPr/>
+        </p:nvSpPr>
+        <p:spPr>
+          <a:xfrm>
+            <a:off x="457200" y="1097280"/>
+            <a:ext cx="11247120" cy="5029200"/>
+          </a:xfrm>
+          <a:prstGeom prst="rect">
+            <a:avLst/>
+          </a:prstGeom>
+          <a:noFill/>
+        </p:spPr>
+        <p:txBody>
+          <a:bodyPr wrap="square">
+            <a:spAutoFit/>
+          </a:bodyPr>
+          <a:lstStyle/>
+          <a:p>
+            <a:pPr algn="l">
+              <a:spcAft>
+                <a:spcPts val="600"/>
+              </a:spcAft>
+            </a:pPr>
+            <a:r>
+              <a:rPr sz="1600">
+                <a:solidFill>
+                  <a:srgbClr val="1E293B"/>
+                </a:solidFill>
+                <a:latin typeface="Microsoft YaHei"/>
+              </a:rPr>
+              <a:t>• 植物的一生是一个循环：种子 → 发芽 → 幼苗 → 长大 → 开花 → 结果 → 新的种子！</a:t>
+            </a:r>
+          </a:p>
+          <a:p>
+            <a:pPr algn="l">
+              <a:spcAft>
+                <a:spcPts val="600"/>
+              </a:spcAft>
+            </a:pPr>
+            <a:r>
+              <a:rPr sz="1600">
+                <a:solidFill>
+                  <a:srgbClr val="1E293B"/>
+                </a:solidFill>
+                <a:latin typeface="Microsoft YaHei"/>
+              </a:rPr>
+              <a:t>• 1. 为什么农民伯伯春天播种，秋天收获？</a:t>
+            </a:r>
+          </a:p>
+          <a:p>
+            <a:pPr algn="l">
+              <a:spcAft>
+                <a:spcPts val="600"/>
+              </a:spcAft>
+            </a:pPr>
+            <a:r>
+              <a:rPr sz="1600">
+                <a:solidFill>
+                  <a:srgbClr val="1E293B"/>
+                </a:solidFill>
+                <a:latin typeface="Microsoft YaHei"/>
+              </a:rPr>
+              <a:t>• 2. 如果你要种一盆花，你会怎样照顾它？</a:t>
+            </a:r>
+          </a:p>
+          <a:p>
+            <a:pPr algn="l">
+              <a:spcAft>
+                <a:spcPts val="600"/>
+              </a:spcAft>
+            </a:pPr>
+            <a:r>
+              <a:rPr sz="1600">
+                <a:solidFill>
+                  <a:srgbClr val="1E293B"/>
+                </a:solidFill>
+                <a:latin typeface="Microsoft YaHei"/>
+              </a:rPr>
+              <a:t>• 3. 你能找到生活中还有哪些植物的"一生"吗？（提示：水果、蔬菜……）</a:t>
+            </a:r>
+          </a:p>
+          <a:p>
+            <a:pPr algn="l">
+              <a:spcAft>
+                <a:spcPts val="600"/>
+              </a:spcAft>
+            </a:pPr>
+            <a:r>
+              <a:rPr sz="1600">
+                <a:solidFill>
+                  <a:srgbClr val="1E293B"/>
+                </a:solidFill>
+                <a:latin typeface="Microsoft YaHei"/>
+              </a:rPr>
+              <a:t>• 🌟 你已经掌握了植物一生的知识！</a:t>
             </a:r>
           </a:p>
         </p:txBody>

--- a/examples/science-plant-life-cycle/science-plant-life-cycle.pptx
+++ b/examples/science-plant-life-cycle/science-plant-life-cycle.pptx
@@ -3949,7 +3949,7 @@
         <p:spPr>
           <a:xfrm>
             <a:off x="457200" y="1097280"/>
-            <a:ext cx="11247120" cy="5029200"/>
+            <a:ext cx="6858000" cy="5029200"/>
           </a:xfrm>
           <a:prstGeom prst="rect">
             <a:avLst/>
@@ -4123,6 +4123,30 @@
           </a:p>
         </p:txBody>
       </p:sp>
+      <p:pic>
+        <p:nvPicPr>
+          <p:cNvPr id="5" name="Picture 4" descr="plant-life-cycle-overview.png"/>
+          <p:cNvPicPr>
+            <a:picLocks noChangeAspect="1"/>
+          </p:cNvPicPr>
+          <p:nvPr/>
+        </p:nvPicPr>
+        <p:blipFill>
+          <a:blip r:embed="rId2"/>
+          <a:stretch>
+            <a:fillRect/>
+          </a:stretch>
+        </p:blipFill>
+        <p:spPr>
+          <a:xfrm>
+            <a:off x="7498079" y="1097280"/>
+            <a:ext cx="4297680" cy="5029200"/>
+          </a:xfrm>
+          <a:prstGeom prst="rect">
+            <a:avLst/>
+          </a:prstGeom>
+        </p:spPr>
+      </p:pic>
     </p:spTree>
   </p:cSld>
   <p:clrMapOvr>
@@ -4508,7 +4532,7 @@
         <p:spPr>
           <a:xfrm>
             <a:off x="457200" y="1097280"/>
-            <a:ext cx="11247120" cy="5029200"/>
+            <a:ext cx="6858000" cy="5029200"/>
           </a:xfrm>
           <a:prstGeom prst="rect">
             <a:avLst/>
@@ -4586,6 +4610,30 @@
           </a:p>
         </p:txBody>
       </p:sp>
+      <p:pic>
+        <p:nvPicPr>
+          <p:cNvPr id="5" name="Picture 4" descr="plant-parts-diagram.png"/>
+          <p:cNvPicPr>
+            <a:picLocks noChangeAspect="1"/>
+          </p:cNvPicPr>
+          <p:nvPr/>
+        </p:nvPicPr>
+        <p:blipFill>
+          <a:blip r:embed="rId2"/>
+          <a:stretch>
+            <a:fillRect/>
+          </a:stretch>
+        </p:blipFill>
+        <p:spPr>
+          <a:xfrm>
+            <a:off x="7498079" y="1097280"/>
+            <a:ext cx="4297680" cy="5029200"/>
+          </a:xfrm>
+          <a:prstGeom prst="rect">
+            <a:avLst/>
+          </a:prstGeom>
+        </p:spPr>
+      </p:pic>
     </p:spTree>
   </p:cSld>
   <p:clrMapOvr>
